--- a/classes/parte-4-seguridad-de-aplicaciones-web/110-seguridad-de-apis-rest/clase-110-presentacion.pptx
+++ b/classes/parte-4-seguridad-de-aplicaciones-web/110-seguridad-de-apis-rest/clase-110-presentacion.pptx
@@ -17,6 +17,9 @@
     <p:sldId id="265" r:id="rId16"/>
     <p:sldId id="266" r:id="rId17"/>
     <p:sldId id="267" r:id="rId18"/>
+    <p:sldId id="268" r:id="rId19"/>
+    <p:sldId id="269" r:id="rId20"/>
+    <p:sldId id="270" r:id="rId21"/>
   </p:sldIdLst>
   <p:sldSz cx="9144000" cy="6858000" type="screen4x3"/>
   <p:notesSz cx="6858000" cy="9144000"/>
@@ -3198,7 +3201,7 @@
                   <a:srgbClr val="0B3D2E"/>
                 </a:solidFill>
               </a:rPr>
-              <a:t>⚠️ Errores comunes</a:t>
+              <a:t>✍️ Ejercicios</a:t>
             </a:r>
           </a:p>
         </p:txBody>
@@ -3236,67 +3239,82 @@
                   <a:srgbClr val="22282E"/>
                 </a:solidFill>
               </a:rPr>
-              <a:t>•  Cambiar el ID da 403 — Hay authz por objeto; busca otro endpoint</a:t>
-            </a:r>
-          </a:p>
-          <a:p>
-            <a:pPr>
-              <a:spcAft>
-                <a:spcPts val="600"/>
-              </a:spcAft>
-            </a:pPr>
-            <a:r>
-              <a:rPr sz="1500">
-                <a:solidFill>
-                  <a:srgbClr val="22282E"/>
-                </a:solidFill>
-              </a:rPr>
-              <a:t>•  Endpoint admin devuelve 401 — Requiere rol; prueba mass assignment para obtenerlo</a:t>
-            </a:r>
-          </a:p>
-          <a:p>
-            <a:pPr>
-              <a:spcAft>
-                <a:spcPts val="600"/>
-              </a:spcAft>
-            </a:pPr>
-            <a:r>
-              <a:rPr sz="1500">
-                <a:solidFill>
-                  <a:srgbClr val="22282E"/>
-                </a:solidFill>
-              </a:rPr>
-              <a:t>•  Mass assignment ignorado — El backend filtra campos; documenta la fortaleza</a:t>
-            </a:r>
-          </a:p>
-          <a:p>
-            <a:pPr>
-              <a:spcAft>
-                <a:spcPts val="600"/>
-              </a:spcAft>
-            </a:pPr>
-            <a:r>
-              <a:rPr sz="1500">
-                <a:solidFill>
-                  <a:srgbClr val="22282E"/>
-                </a:solidFill>
-              </a:rPr>
-              <a:t>•  No encuentro endpoints — Revisa Swagger y el JS del cliente</a:t>
-            </a:r>
-          </a:p>
-          <a:p>
-            <a:pPr>
-              <a:spcAft>
-                <a:spcPts val="600"/>
-              </a:spcAft>
-            </a:pPr>
-            <a:r>
-              <a:rPr sz="1500">
-                <a:solidFill>
-                  <a:srgbClr val="22282E"/>
-                </a:solidFill>
-              </a:rPr>
-              <a:t>•  Rate limit corta las pruebas — Baja el ritmo; documenta el límite</a:t>
+              <a:t>•  Enumera los endpoints de crAPI y agrúpalos por sensibilidad.</a:t>
+            </a:r>
+          </a:p>
+          <a:p>
+            <a:pPr>
+              <a:spcAft>
+                <a:spcPts val="600"/>
+              </a:spcAft>
+            </a:pPr>
+            <a:r>
+              <a:rPr sz="1500">
+                <a:solidFill>
+                  <a:srgbClr val="22282E"/>
+                </a:solidFill>
+              </a:rPr>
+              <a:t>•  Explota un BOLA y documenta el dato de otro usuario obtenido.</a:t>
+            </a:r>
+          </a:p>
+          <a:p>
+            <a:pPr>
+              <a:spcAft>
+                <a:spcPts val="600"/>
+              </a:spcAft>
+            </a:pPr>
+            <a:r>
+              <a:rPr sz="1500">
+                <a:solidFill>
+                  <a:srgbClr val="22282E"/>
+                </a:solidFill>
+              </a:rPr>
+              <a:t>•  Encuentra un endpoint sin control de función y escálalo.</a:t>
+            </a:r>
+          </a:p>
+          <a:p>
+            <a:pPr>
+              <a:spcAft>
+                <a:spcPts val="600"/>
+              </a:spcAft>
+            </a:pPr>
+            <a:r>
+              <a:rPr sz="1500">
+                <a:solidFill>
+                  <a:srgbClr val="22282E"/>
+                </a:solidFill>
+              </a:rPr>
+              <a:t>•  Detecta exposición excesiva comparando lo mostrado en la UI vs. la respuesta cruda.</a:t>
+            </a:r>
+          </a:p>
+          <a:p>
+            <a:pPr>
+              <a:spcAft>
+                <a:spcPts val="600"/>
+              </a:spcAft>
+            </a:pPr>
+            <a:r>
+              <a:rPr sz="1500">
+                <a:solidFill>
+                  <a:srgbClr val="22282E"/>
+                </a:solidFill>
+              </a:rPr>
+              <a:t>•  Realiza un mass assignment que eleve privilegios en el lab.</a:t>
+            </a:r>
+          </a:p>
+          <a:p>
+            <a:pPr>
+              <a:spcAft>
+                <a:spcPts val="600"/>
+              </a:spcAft>
+            </a:pPr>
+            <a:r>
+              <a:rPr sz="1500">
+                <a:solidFill>
+                  <a:srgbClr val="22282E"/>
+                </a:solidFill>
+              </a:rPr>
+              <a:t>•  Diseña la autorización correcta por objeto y por función.</a:t>
             </a:r>
           </a:p>
         </p:txBody>
@@ -3347,7 +3365,7 @@
                   <a:srgbClr val="0B3D2E"/>
                 </a:solidFill>
               </a:rPr>
-              <a:t>❓ Preguntas frecuentes</a:t>
+              <a:t>📝 Reto verificable</a:t>
             </a:r>
           </a:p>
         </p:txBody>
@@ -3385,82 +3403,22 @@
                   <a:srgbClr val="22282E"/>
                 </a:solidFill>
               </a:rPr>
-              <a:t>•  ❓ ¿BOLA e IDOR son lo mismo?</a:t>
-            </a:r>
-          </a:p>
-          <a:p>
-            <a:pPr>
-              <a:spcAft>
-                <a:spcPts val="600"/>
-              </a:spcAft>
-            </a:pPr>
-            <a:r>
-              <a:rPr sz="1500">
-                <a:solidFill>
-                  <a:srgbClr val="22282E"/>
-                </a:solidFill>
-              </a:rPr>
-              <a:t>•  Conceptualmente sí; BOLA es el término de OWASP API para el IDOR a nivel de objeto en APIs.</a:t>
-            </a:r>
-          </a:p>
-          <a:p>
-            <a:pPr>
-              <a:spcAft>
-                <a:spcPts val="600"/>
-              </a:spcAft>
-            </a:pPr>
-            <a:r>
-              <a:rPr sz="1500">
-                <a:solidFill>
-                  <a:srgbClr val="22282E"/>
-                </a:solidFill>
-              </a:rPr>
-              <a:t>•  ❓ ¿Por qué la exposición excesiva es un problema si la UI no lo muestra?</a:t>
-            </a:r>
-          </a:p>
-          <a:p>
-            <a:pPr>
-              <a:spcAft>
-                <a:spcPts val="600"/>
-              </a:spcAft>
-            </a:pPr>
-            <a:r>
-              <a:rPr sz="1500">
-                <a:solidFill>
-                  <a:srgbClr val="22282E"/>
-                </a:solidFill>
-              </a:rPr>
-              <a:t>•  Porque el dato viaja al cliente y cualquiera puede leer la respuesta cruda; el filtrado en el cliente no protege nada.</a:t>
-            </a:r>
-          </a:p>
-          <a:p>
-            <a:pPr>
-              <a:spcAft>
-                <a:spcPts val="600"/>
-              </a:spcAft>
-            </a:pPr>
-            <a:r>
-              <a:rPr sz="1500">
-                <a:solidFill>
-                  <a:srgbClr val="22282E"/>
-                </a:solidFill>
-              </a:rPr>
-              <a:t>•  ❓ ¿Cómo evito mass assignment?</a:t>
-            </a:r>
-          </a:p>
-          <a:p>
-            <a:pPr>
-              <a:spcAft>
-                <a:spcPts val="600"/>
-              </a:spcAft>
-            </a:pPr>
-            <a:r>
-              <a:rPr sz="1500">
-                <a:solidFill>
-                  <a:srgbClr val="22282E"/>
-                </a:solidFill>
-              </a:rPr>
-              <a:t>•  Usa allowlists de campos aceptados (DTOs), nunca vincules el body directamente al modelo de datos.</a:t>
+              <a:t>•  En crAPI (o VAmPI), consigue acceso a datos de otro usuario vía BOLA y una escalada por mass assignment, documentando ambos.</a:t>
+            </a:r>
+          </a:p>
+          <a:p>
+            <a:pPr>
+              <a:spcAft>
+                <a:spcPts val="600"/>
+              </a:spcAft>
+            </a:pPr>
+            <a:r>
+              <a:rPr sz="1500">
+                <a:solidFill>
+                  <a:srgbClr val="22282E"/>
+                </a:solidFill>
+              </a:rPr>
+              <a:t>•  Criterio de aceptación: entregas las peticiones, la evidencia de acceso no autorizado y elevación de privilegio, y la defensa (comprobar propiedad del objeto, allowlist de campos, authz por función).</a:t>
             </a:r>
           </a:p>
         </p:txBody>
@@ -3511,7 +3469,7 @@
                   <a:srgbClr val="0B3D2E"/>
                 </a:solidFill>
               </a:rPr>
-              <a:t>🔗 Referencias</a:t>
+              <a:t>⚠️ Errores comunes</a:t>
             </a:r>
           </a:p>
         </p:txBody>
@@ -3549,6 +3507,319 @@
                   <a:srgbClr val="22282E"/>
                 </a:solidFill>
               </a:rPr>
+              <a:t>•  Cambiar el ID da 403 — Hay authz por objeto; busca otro endpoint</a:t>
+            </a:r>
+          </a:p>
+          <a:p>
+            <a:pPr>
+              <a:spcAft>
+                <a:spcPts val="600"/>
+              </a:spcAft>
+            </a:pPr>
+            <a:r>
+              <a:rPr sz="1500">
+                <a:solidFill>
+                  <a:srgbClr val="22282E"/>
+                </a:solidFill>
+              </a:rPr>
+              <a:t>•  Endpoint admin devuelve 401 — Requiere rol; prueba mass assignment para obtenerlo</a:t>
+            </a:r>
+          </a:p>
+          <a:p>
+            <a:pPr>
+              <a:spcAft>
+                <a:spcPts val="600"/>
+              </a:spcAft>
+            </a:pPr>
+            <a:r>
+              <a:rPr sz="1500">
+                <a:solidFill>
+                  <a:srgbClr val="22282E"/>
+                </a:solidFill>
+              </a:rPr>
+              <a:t>•  Mass assignment ignorado — El backend filtra campos; documenta la fortaleza</a:t>
+            </a:r>
+          </a:p>
+          <a:p>
+            <a:pPr>
+              <a:spcAft>
+                <a:spcPts val="600"/>
+              </a:spcAft>
+            </a:pPr>
+            <a:r>
+              <a:rPr sz="1500">
+                <a:solidFill>
+                  <a:srgbClr val="22282E"/>
+                </a:solidFill>
+              </a:rPr>
+              <a:t>•  No encuentro endpoints — Revisa Swagger y el JS del cliente</a:t>
+            </a:r>
+          </a:p>
+          <a:p>
+            <a:pPr>
+              <a:spcAft>
+                <a:spcPts val="600"/>
+              </a:spcAft>
+            </a:pPr>
+            <a:r>
+              <a:rPr sz="1500">
+                <a:solidFill>
+                  <a:srgbClr val="22282E"/>
+                </a:solidFill>
+              </a:rPr>
+              <a:t>•  Rate limit corta las pruebas — Baja el ritmo; documenta el límite</a:t>
+            </a:r>
+          </a:p>
+        </p:txBody>
+      </p:sp>
+    </p:spTree>
+  </p:cSld>
+  <p:clrMapOvr>
+    <a:masterClrMapping/>
+  </p:clrMapOvr>
+</p:sld>
+</file>
+
+<file path=ppt/slides/slide13.xml><?xml version="1.0" encoding="utf-8"?>
+<p:sld xmlns:a="http://schemas.openxmlformats.org/drawingml/2006/main" xmlns:p="http://schemas.openxmlformats.org/presentationml/2006/main" xmlns:r="http://schemas.openxmlformats.org/officeDocument/2006/relationships">
+  <p:cSld>
+    <p:spTree>
+      <p:nvGrpSpPr>
+        <p:cNvPr id="1" name=""/>
+        <p:cNvGrpSpPr/>
+        <p:nvPr/>
+      </p:nvGrpSpPr>
+      <p:grpSpPr/>
+      <p:sp>
+        <p:nvSpPr>
+          <p:cNvPr id="2" name="TextBox 1"/>
+          <p:cNvSpPr txBox="1"/>
+          <p:nvPr/>
+        </p:nvSpPr>
+        <p:spPr>
+          <a:xfrm>
+            <a:off x="457200" y="320040"/>
+            <a:ext cx="8229600" cy="822960"/>
+          </a:xfrm>
+          <a:prstGeom prst="rect">
+            <a:avLst/>
+          </a:prstGeom>
+          <a:noFill/>
+        </p:spPr>
+        <p:txBody>
+          <a:bodyPr wrap="square">
+            <a:spAutoFit/>
+          </a:bodyPr>
+          <a:lstStyle/>
+          <a:p>
+            <a:r>
+              <a:rPr sz="2600" b="1">
+                <a:solidFill>
+                  <a:srgbClr val="0B3D2E"/>
+                </a:solidFill>
+              </a:rPr>
+              <a:t>❓ Preguntas frecuentes</a:t>
+            </a:r>
+          </a:p>
+        </p:txBody>
+      </p:sp>
+      <p:sp>
+        <p:nvSpPr>
+          <p:cNvPr id="3" name="TextBox 2"/>
+          <p:cNvSpPr txBox="1"/>
+          <p:nvPr/>
+        </p:nvSpPr>
+        <p:spPr>
+          <a:xfrm>
+            <a:off x="457200" y="1280160"/>
+            <a:ext cx="8229600" cy="4937760"/>
+          </a:xfrm>
+          <a:prstGeom prst="rect">
+            <a:avLst/>
+          </a:prstGeom>
+          <a:noFill/>
+        </p:spPr>
+        <p:txBody>
+          <a:bodyPr wrap="square">
+            <a:spAutoFit/>
+          </a:bodyPr>
+          <a:lstStyle/>
+          <a:p>
+            <a:pPr>
+              <a:spcAft>
+                <a:spcPts val="600"/>
+              </a:spcAft>
+            </a:pPr>
+            <a:r>
+              <a:rPr sz="1500">
+                <a:solidFill>
+                  <a:srgbClr val="22282E"/>
+                </a:solidFill>
+              </a:rPr>
+              <a:t>•  ❓ ¿BOLA e IDOR son lo mismo?</a:t>
+            </a:r>
+          </a:p>
+          <a:p>
+            <a:pPr>
+              <a:spcAft>
+                <a:spcPts val="600"/>
+              </a:spcAft>
+            </a:pPr>
+            <a:r>
+              <a:rPr sz="1500">
+                <a:solidFill>
+                  <a:srgbClr val="22282E"/>
+                </a:solidFill>
+              </a:rPr>
+              <a:t>•  Conceptualmente sí; BOLA es el término de OWASP API para el IDOR a nivel de objeto en APIs.</a:t>
+            </a:r>
+          </a:p>
+          <a:p>
+            <a:pPr>
+              <a:spcAft>
+                <a:spcPts val="600"/>
+              </a:spcAft>
+            </a:pPr>
+            <a:r>
+              <a:rPr sz="1500">
+                <a:solidFill>
+                  <a:srgbClr val="22282E"/>
+                </a:solidFill>
+              </a:rPr>
+              <a:t>•  ❓ ¿Por qué la exposición excesiva es un problema si la UI no lo muestra?</a:t>
+            </a:r>
+          </a:p>
+          <a:p>
+            <a:pPr>
+              <a:spcAft>
+                <a:spcPts val="600"/>
+              </a:spcAft>
+            </a:pPr>
+            <a:r>
+              <a:rPr sz="1500">
+                <a:solidFill>
+                  <a:srgbClr val="22282E"/>
+                </a:solidFill>
+              </a:rPr>
+              <a:t>•  Porque el dato viaja al cliente y cualquiera puede leer la respuesta cruda; el filtrado en el cliente no protege nada.</a:t>
+            </a:r>
+          </a:p>
+          <a:p>
+            <a:pPr>
+              <a:spcAft>
+                <a:spcPts val="600"/>
+              </a:spcAft>
+            </a:pPr>
+            <a:r>
+              <a:rPr sz="1500">
+                <a:solidFill>
+                  <a:srgbClr val="22282E"/>
+                </a:solidFill>
+              </a:rPr>
+              <a:t>•  ❓ ¿Cómo evito mass assignment?</a:t>
+            </a:r>
+          </a:p>
+          <a:p>
+            <a:pPr>
+              <a:spcAft>
+                <a:spcPts val="600"/>
+              </a:spcAft>
+            </a:pPr>
+            <a:r>
+              <a:rPr sz="1500">
+                <a:solidFill>
+                  <a:srgbClr val="22282E"/>
+                </a:solidFill>
+              </a:rPr>
+              <a:t>•  Usa allowlists de campos aceptados (DTOs), nunca vincules el body directamente al modelo de datos.</a:t>
+            </a:r>
+          </a:p>
+        </p:txBody>
+      </p:sp>
+    </p:spTree>
+  </p:cSld>
+  <p:clrMapOvr>
+    <a:masterClrMapping/>
+  </p:clrMapOvr>
+</p:sld>
+</file>
+
+<file path=ppt/slides/slide14.xml><?xml version="1.0" encoding="utf-8"?>
+<p:sld xmlns:a="http://schemas.openxmlformats.org/drawingml/2006/main" xmlns:p="http://schemas.openxmlformats.org/presentationml/2006/main" xmlns:r="http://schemas.openxmlformats.org/officeDocument/2006/relationships">
+  <p:cSld>
+    <p:spTree>
+      <p:nvGrpSpPr>
+        <p:cNvPr id="1" name=""/>
+        <p:cNvGrpSpPr/>
+        <p:nvPr/>
+      </p:nvGrpSpPr>
+      <p:grpSpPr/>
+      <p:sp>
+        <p:nvSpPr>
+          <p:cNvPr id="2" name="TextBox 1"/>
+          <p:cNvSpPr txBox="1"/>
+          <p:nvPr/>
+        </p:nvSpPr>
+        <p:spPr>
+          <a:xfrm>
+            <a:off x="457200" y="320040"/>
+            <a:ext cx="8229600" cy="822960"/>
+          </a:xfrm>
+          <a:prstGeom prst="rect">
+            <a:avLst/>
+          </a:prstGeom>
+          <a:noFill/>
+        </p:spPr>
+        <p:txBody>
+          <a:bodyPr wrap="square">
+            <a:spAutoFit/>
+          </a:bodyPr>
+          <a:lstStyle/>
+          <a:p>
+            <a:r>
+              <a:rPr sz="2600" b="1">
+                <a:solidFill>
+                  <a:srgbClr val="0B3D2E"/>
+                </a:solidFill>
+              </a:rPr>
+              <a:t>🔗 Referencias</a:t>
+            </a:r>
+          </a:p>
+        </p:txBody>
+      </p:sp>
+      <p:sp>
+        <p:nvSpPr>
+          <p:cNvPr id="3" name="TextBox 2"/>
+          <p:cNvSpPr txBox="1"/>
+          <p:nvPr/>
+        </p:nvSpPr>
+        <p:spPr>
+          <a:xfrm>
+            <a:off x="457200" y="1280160"/>
+            <a:ext cx="8229600" cy="4937760"/>
+          </a:xfrm>
+          <a:prstGeom prst="rect">
+            <a:avLst/>
+          </a:prstGeom>
+          <a:noFill/>
+        </p:spPr>
+        <p:txBody>
+          <a:bodyPr wrap="square">
+            <a:spAutoFit/>
+          </a:bodyPr>
+          <a:lstStyle/>
+          <a:p>
+            <a:pPr>
+              <a:spcAft>
+                <a:spcPts val="600"/>
+              </a:spcAft>
+            </a:pPr>
+            <a:r>
+              <a:rPr sz="1500">
+                <a:solidFill>
+                  <a:srgbClr val="22282E"/>
+                </a:solidFill>
+              </a:rPr>
               <a:t>•  OWASP API Security Top 10: &lt;https://owasp.org/API-Security/&gt;</a:t>
             </a:r>
           </a:p>
@@ -3599,6 +3870,81 @@
           </a:p>
         </p:txBody>
       </p:sp>
+    </p:spTree>
+  </p:cSld>
+  <p:clrMapOvr>
+    <a:masterClrMapping/>
+  </p:clrMapOvr>
+</p:sld>
+</file>
+
+<file path=ppt/slides/slide15.xml><?xml version="1.0" encoding="utf-8"?>
+<p:sld xmlns:a="http://schemas.openxmlformats.org/drawingml/2006/main" xmlns:p="http://schemas.openxmlformats.org/presentationml/2006/main" xmlns:r="http://schemas.openxmlformats.org/officeDocument/2006/relationships">
+  <p:cSld>
+    <p:spTree>
+      <p:nvGrpSpPr>
+        <p:cNvPr id="1" name=""/>
+        <p:cNvGrpSpPr/>
+        <p:nvPr/>
+      </p:nvGrpSpPr>
+      <p:grpSpPr/>
+      <p:sp>
+        <p:nvSpPr>
+          <p:cNvPr id="2" name="TextBox 1"/>
+          <p:cNvSpPr txBox="1"/>
+          <p:nvPr/>
+        </p:nvSpPr>
+        <p:spPr>
+          <a:xfrm>
+            <a:off x="457200" y="274320"/>
+            <a:ext cx="8229600" cy="640080"/>
+          </a:xfrm>
+          <a:prstGeom prst="rect">
+            <a:avLst/>
+          </a:prstGeom>
+          <a:noFill/>
+        </p:spPr>
+        <p:txBody>
+          <a:bodyPr wrap="square">
+            <a:spAutoFit/>
+          </a:bodyPr>
+          <a:lstStyle/>
+          <a:p>
+            <a:r>
+              <a:rPr sz="2200" b="1">
+                <a:solidFill>
+                  <a:srgbClr val="0B3D2E"/>
+                </a:solidFill>
+              </a:rPr>
+              <a:t>Diagrama de la clase</a:t>
+            </a:r>
+          </a:p>
+        </p:txBody>
+      </p:sp>
+      <p:pic>
+        <p:nvPicPr>
+          <p:cNvPr id="3" name="Picture 2" descr="e0b244a54cc05fac.png"/>
+          <p:cNvPicPr>
+            <a:picLocks noChangeAspect="1"/>
+          </p:cNvPicPr>
+          <p:nvPr/>
+        </p:nvPicPr>
+        <p:blipFill>
+          <a:blip r:embed="rId2"/>
+          <a:stretch>
+            <a:fillRect/>
+          </a:stretch>
+        </p:blipFill>
+        <p:spPr>
+          <a:xfrm>
+            <a:off x="457200" y="3003804"/>
+            <a:ext cx="8229600" cy="1490472"/>
+          </a:xfrm>
+          <a:prstGeom prst="rect">
+            <a:avLst/>
+          </a:prstGeom>
+        </p:spPr>
+      </p:pic>
     </p:spTree>
   </p:cSld>
   <p:clrMapOvr>
@@ -3683,7 +4029,7 @@
                   <a:srgbClr val="22282E"/>
                 </a:solidFill>
               </a:rPr>
-              <a:t>•  Auditar la seguridad de APIs REST, hoy el backend de casi toda aplicación moderna. Usaremos el OWASP API Security Top 10 como marco, con foco en BOLA/IDOR a nivel de API, autorización rota a nivel de función y exposición excesiva de datos.</a:t>
+              <a:t>•  Auditar la seguridad de APIs REST, hoy el backend de casi toda aplicación moderna. Usaremos el OWASP API Security Top 10 como marco, con foco en BOLA/IDOR a nivel de API, autorización rota a nivel de…</a:t>
             </a:r>
           </a:p>
         </p:txBody>
@@ -4077,7 +4423,7 @@
                   <a:srgbClr val="0B3D2E"/>
                 </a:solidFill>
               </a:rPr>
-              <a:t>📖 Definiciones y características</a:t>
+              <a:t>🧠 Explicación en profundidad</a:t>
             </a:r>
           </a:p>
         </p:txBody>
@@ -4115,82 +4461,97 @@
                   <a:srgbClr val="22282E"/>
                 </a:solidFill>
               </a:rPr>
-              <a:t>•  API REST: interfaz basada en HTTP y recursos con verbos (GET, POST, PUT, DELETE). Característica: cada endpoint necesita autorización propia.</a:t>
-            </a:r>
-          </a:p>
-          <a:p>
-            <a:pPr>
-              <a:spcAft>
-                <a:spcPts val="600"/>
-              </a:spcAft>
-            </a:pPr>
-            <a:r>
-              <a:rPr sz="1500">
-                <a:solidFill>
-                  <a:srgbClr val="22282E"/>
-                </a:solidFill>
-              </a:rPr>
-              <a:t>•  BOLA: acceder a objetos de otros usuarios manipulando su identificador. Característica: el IDOR de las APIs; la nº1 de OWASP API.</a:t>
-            </a:r>
-          </a:p>
-          <a:p>
-            <a:pPr>
-              <a:spcAft>
-                <a:spcPts val="600"/>
-              </a:spcAft>
-            </a:pPr>
-            <a:r>
-              <a:rPr sz="1500">
-                <a:solidFill>
-                  <a:srgbClr val="22282E"/>
-                </a:solidFill>
-              </a:rPr>
-              <a:t>•  Broken Function Level Authorization: usar funciones para las que no se tiene rol. Característica: escalada vertical vía endpoints admin.</a:t>
-            </a:r>
-          </a:p>
-          <a:p>
-            <a:pPr>
-              <a:spcAft>
-                <a:spcPts val="600"/>
-              </a:spcAft>
-            </a:pPr>
-            <a:r>
-              <a:rPr sz="1500">
-                <a:solidFill>
-                  <a:srgbClr val="22282E"/>
-                </a:solidFill>
-              </a:rPr>
-              <a:t>•  Excessive Data Exposure: la API devuelve más campos de los necesarios y el cliente filtra. Característica: fuga de datos sensibles.</a:t>
-            </a:r>
-          </a:p>
-          <a:p>
-            <a:pPr>
-              <a:spcAft>
-                <a:spcPts val="600"/>
-              </a:spcAft>
-            </a:pPr>
-            <a:r>
-              <a:rPr sz="1500">
-                <a:solidFill>
-                  <a:srgbClr val="22282E"/>
-                </a:solidFill>
-              </a:rPr>
-              <a:t>•  Mass assignment: enviar campos extra que el backend asigna sin filtrar (isAdmin:true). Característica: sobre-escritura de propiedades.</a:t>
-            </a:r>
-          </a:p>
-          <a:p>
-            <a:pPr>
-              <a:spcAft>
-                <a:spcPts val="600"/>
-              </a:spcAft>
-            </a:pPr>
-            <a:r>
-              <a:rPr sz="1500">
-                <a:solidFill>
-                  <a:srgbClr val="22282E"/>
-                </a:solidFill>
-              </a:rPr>
-              <a:t>•  Documentación (Swagger/OpenAPI): especificación de la API. Característica: gran fuente de endpoints al auditar.</a:t>
+              <a:t>•  Las aplicaciones modernas son en su mayoría un frontend que consume APIs (clase 086), y las APIs</a:t>
+            </a:r>
+          </a:p>
+          <a:p>
+            <a:pPr>
+              <a:spcAft>
+                <a:spcPts val="600"/>
+              </a:spcAft>
+            </a:pPr>
+            <a:r>
+              <a:rPr sz="1500">
+                <a:solidFill>
+                  <a:srgbClr val="22282E"/>
+                </a:solidFill>
+              </a:rPr>
+              <a:t>•  tienen un perfil de riesgo tan distinto que OWASP publica un API Security Top 10 propio. La razón</a:t>
+            </a:r>
+          </a:p>
+          <a:p>
+            <a:pPr>
+              <a:spcAft>
+                <a:spcPts val="600"/>
+              </a:spcAft>
+            </a:pPr>
+            <a:r>
+              <a:rPr sz="1500">
+                <a:solidFill>
+                  <a:srgbClr val="22282E"/>
+                </a:solidFill>
+              </a:rPr>
+              <a:t>•  es estructural: una API expone directamente la lógica y los datos en endpoints estructurados y</a:t>
+            </a:r>
+          </a:p>
+          <a:p>
+            <a:pPr>
+              <a:spcAft>
+                <a:spcPts val="600"/>
+              </a:spcAft>
+            </a:pPr>
+            <a:r>
+              <a:rPr sz="1500">
+                <a:solidFill>
+                  <a:srgbClr val="22282E"/>
+                </a:solidFill>
+              </a:rPr>
+              <a:t>•  predecibles, a menudo sin la capa de interfaz que en una web clásica ocultaba parte de la superficie.</a:t>
+            </a:r>
+          </a:p>
+          <a:p>
+            <a:pPr>
+              <a:spcAft>
+                <a:spcPts val="600"/>
+              </a:spcAft>
+            </a:pPr>
+            <a:r>
+              <a:rPr sz="1500">
+                <a:solidFill>
+                  <a:srgbClr val="22282E"/>
+                </a:solidFill>
+              </a:rPr>
+              <a:t>•  Muchos fallos que en una web se mitigaban por accidente (porque el enlace no estaba, porque la página</a:t>
+            </a:r>
+          </a:p>
+          <a:p>
+            <a:pPr>
+              <a:spcAft>
+                <a:spcPts val="600"/>
+              </a:spcAft>
+            </a:pPr>
+            <a:r>
+              <a:rPr sz="1500">
+                <a:solidFill>
+                  <a:srgbClr val="22282E"/>
+                </a:solidFill>
+              </a:rPr>
+              <a:t>•  no lo mostraba) en una API quedan a plena vista para quien sepa hacer la petición. Las dos categorías</a:t>
+            </a:r>
+          </a:p>
+          <a:p>
+            <a:pPr>
+              <a:spcAft>
+                <a:spcPts val="600"/>
+              </a:spcAft>
+            </a:pPr>
+            <a:r>
+              <a:rPr sz="1500">
+                <a:solidFill>
+                  <a:srgbClr val="22282E"/>
+                </a:solidFill>
+              </a:rPr>
+              <a:t>•  que dominan las brechas de API son de autorización, y merecen entenderse bien.</a:t>
             </a:r>
           </a:p>
         </p:txBody>
@@ -4241,7 +4602,7 @@
                   <a:srgbClr val="0B3D2E"/>
                 </a:solidFill>
               </a:rPr>
-              <a:t>🧰 Herramientas y preparación</a:t>
+              <a:t>📖 Definiciones y características</a:t>
             </a:r>
           </a:p>
         </p:txBody>
@@ -4279,52 +4640,82 @@
                   <a:srgbClr val="22282E"/>
                 </a:solidFill>
               </a:rPr>
-              <a:t>•  Postman o Burp para construir peticiones a la API.</a:t>
-            </a:r>
-          </a:p>
-          <a:p>
-            <a:pPr>
-              <a:spcAft>
-                <a:spcPts val="600"/>
-              </a:spcAft>
-            </a:pPr>
-            <a:r>
-              <a:rPr sz="1500">
-                <a:solidFill>
-                  <a:srgbClr val="22282E"/>
-                </a:solidFill>
-              </a:rPr>
-              <a:t>•  crAPI o VAmPI (APIs deliberadamente vulnerables) y Juice Shop.</a:t>
-            </a:r>
-          </a:p>
-          <a:p>
-            <a:pPr>
-              <a:spcAft>
-                <a:spcPts val="600"/>
-              </a:spcAft>
-            </a:pPr>
-            <a:r>
-              <a:rPr sz="1500">
-                <a:solidFill>
-                  <a:srgbClr val="22282E"/>
-                </a:solidFill>
-              </a:rPr>
-              <a:t>•  Especificación OpenAPI/Swagger si está disponible.</a:t>
-            </a:r>
-          </a:p>
-          <a:p>
-            <a:pPr>
-              <a:spcAft>
-                <a:spcPts val="600"/>
-              </a:spcAft>
-            </a:pPr>
-            <a:r>
-              <a:rPr sz="1500">
-                <a:solidFill>
-                  <a:srgbClr val="22282E"/>
-                </a:solidFill>
-              </a:rPr>
-              <a:t>•  git clone https://github.com/OWASP/crAPI &amp;&amp; cd crAPI &amp;&amp; docker compose up</a:t>
+              <a:t>•  API REST: interfaz basada en HTTP y recursos con verbos (GET, POST, PUT, DELETE). Característica: cada endpoint necesita autorización propia.</a:t>
+            </a:r>
+          </a:p>
+          <a:p>
+            <a:pPr>
+              <a:spcAft>
+                <a:spcPts val="600"/>
+              </a:spcAft>
+            </a:pPr>
+            <a:r>
+              <a:rPr sz="1500">
+                <a:solidFill>
+                  <a:srgbClr val="22282E"/>
+                </a:solidFill>
+              </a:rPr>
+              <a:t>•  BOLA: acceder a objetos de otros usuarios manipulando su identificador. Característica: el IDOR de las APIs; la nº1 de OWASP API.</a:t>
+            </a:r>
+          </a:p>
+          <a:p>
+            <a:pPr>
+              <a:spcAft>
+                <a:spcPts val="600"/>
+              </a:spcAft>
+            </a:pPr>
+            <a:r>
+              <a:rPr sz="1500">
+                <a:solidFill>
+                  <a:srgbClr val="22282E"/>
+                </a:solidFill>
+              </a:rPr>
+              <a:t>•  Broken Function Level Authorization: usar funciones para las que no se tiene rol. Característica: escalada vertical vía endpoints admin.</a:t>
+            </a:r>
+          </a:p>
+          <a:p>
+            <a:pPr>
+              <a:spcAft>
+                <a:spcPts val="600"/>
+              </a:spcAft>
+            </a:pPr>
+            <a:r>
+              <a:rPr sz="1500">
+                <a:solidFill>
+                  <a:srgbClr val="22282E"/>
+                </a:solidFill>
+              </a:rPr>
+              <a:t>•  Excessive Data Exposure: la API devuelve más campos de los necesarios y el cliente filtra. Característica: fuga de datos sensibles.</a:t>
+            </a:r>
+          </a:p>
+          <a:p>
+            <a:pPr>
+              <a:spcAft>
+                <a:spcPts val="600"/>
+              </a:spcAft>
+            </a:pPr>
+            <a:r>
+              <a:rPr sz="1500">
+                <a:solidFill>
+                  <a:srgbClr val="22282E"/>
+                </a:solidFill>
+              </a:rPr>
+              <a:t>•  Mass assignment: enviar campos extra que el backend asigna sin filtrar (isAdmin:true). Característica: sobre-escritura de propiedades.</a:t>
+            </a:r>
+          </a:p>
+          <a:p>
+            <a:pPr>
+              <a:spcAft>
+                <a:spcPts val="600"/>
+              </a:spcAft>
+            </a:pPr>
+            <a:r>
+              <a:rPr sz="1500">
+                <a:solidFill>
+                  <a:srgbClr val="22282E"/>
+                </a:solidFill>
+              </a:rPr>
+              <a:t>•  Documentación (Swagger/OpenAPI): especificación de la API. Característica: gran fuente de endpoints al auditar.</a:t>
             </a:r>
           </a:p>
         </p:txBody>
@@ -4375,7 +4766,7 @@
                   <a:srgbClr val="0B3D2E"/>
                 </a:solidFill>
               </a:rPr>
-              <a:t>🧪 Laboratorio guiado</a:t>
+              <a:t>📔 Glosario</a:t>
             </a:r>
           </a:p>
         </p:txBody>
@@ -4413,97 +4804,97 @@
                   <a:srgbClr val="22282E"/>
                 </a:solidFill>
               </a:rPr>
-              <a:t>•  Descubre endpoints desde el Swagger/OpenAPI o analizando el JS del cliente.</a:t>
-            </a:r>
-          </a:p>
-          <a:p>
-            <a:pPr>
-              <a:spcAft>
-                <a:spcPts val="600"/>
-              </a:spcAft>
-            </a:pPr>
-            <a:r>
-              <a:rPr sz="1500">
-                <a:solidFill>
-                  <a:srgbClr val="22282E"/>
-                </a:solidFill>
-              </a:rPr>
-              <a:t>•  Autentícate como usuario A y localiza GET /api/users/{id}/orders.</a:t>
-            </a:r>
-          </a:p>
-          <a:p>
-            <a:pPr>
-              <a:spcAft>
-                <a:spcPts val="600"/>
-              </a:spcAft>
-            </a:pPr>
-            <a:r>
-              <a:rPr sz="1500">
-                <a:solidFill>
-                  <a:srgbClr val="22282E"/>
-                </a:solidFill>
-              </a:rPr>
-              <a:t>•  Cambia {id} al de otro usuario y comprueba BOLA.</a:t>
-            </a:r>
-          </a:p>
-          <a:p>
-            <a:pPr>
-              <a:spcAft>
-                <a:spcPts val="600"/>
-              </a:spcAft>
-            </a:pPr>
-            <a:r>
-              <a:rPr sz="1500">
-                <a:solidFill>
-                  <a:srgbClr val="22282E"/>
-                </a:solidFill>
-              </a:rPr>
-              <a:t>•  Prueba Broken Function Level Authorization: llama a un endpoint admin (/api/admin/...) con tu token normal.</a:t>
-            </a:r>
-          </a:p>
-          <a:p>
-            <a:pPr>
-              <a:spcAft>
-                <a:spcPts val="600"/>
-              </a:spcAft>
-            </a:pPr>
-            <a:r>
-              <a:rPr sz="1500">
-                <a:solidFill>
-                  <a:srgbClr val="22282E"/>
-                </a:solidFill>
-              </a:rPr>
-              <a:t>•  Inspecciona respuestas por exposición excesiva: ¿devuelve hashes, emails, roles no necesarios?</a:t>
-            </a:r>
-          </a:p>
-          <a:p>
-            <a:pPr>
-              <a:spcAft>
-                <a:spcPts val="600"/>
-              </a:spcAft>
-            </a:pPr>
-            <a:r>
-              <a:rPr sz="1500">
-                <a:solidFill>
-                  <a:srgbClr val="22282E"/>
-                </a:solidFill>
-              </a:rPr>
-              <a:t>•  Prueba mass assignment: añade "role":"admin" o "verified":true en un PUT de perfil.</a:t>
-            </a:r>
-          </a:p>
-          <a:p>
-            <a:pPr>
-              <a:spcAft>
-                <a:spcPts val="600"/>
-              </a:spcAft>
-            </a:pPr>
-            <a:r>
-              <a:rPr sz="1500">
-                <a:solidFill>
-                  <a:srgbClr val="22282E"/>
-                </a:solidFill>
-              </a:rPr>
-              <a:t>•  Evalúa el rate limiting enviando muchas peticiones y documenta el abuso posible.</a:t>
+              <a:t>•  Término — Definición concisa</a:t>
+            </a:r>
+          </a:p>
+          <a:p>
+            <a:pPr>
+              <a:spcAft>
+                <a:spcPts val="600"/>
+              </a:spcAft>
+            </a:pPr>
+            <a:r>
+              <a:rPr sz="1500">
+                <a:solidFill>
+                  <a:srgbClr val="22282E"/>
+                </a:solidFill>
+              </a:rPr>
+              <a:t>•  API REST — Backend que expone datos y lógica en endpoints estructurados</a:t>
+            </a:r>
+          </a:p>
+          <a:p>
+            <a:pPr>
+              <a:spcAft>
+                <a:spcPts val="600"/>
+              </a:spcAft>
+            </a:pPr>
+            <a:r>
+              <a:rPr sz="1500">
+                <a:solidFill>
+                  <a:srgbClr val="22282E"/>
+                </a:solidFill>
+              </a:rPr>
+              <a:t>•  API Security Top 10 — Lista OWASP específica de riesgos de API</a:t>
+            </a:r>
+          </a:p>
+          <a:p>
+            <a:pPr>
+              <a:spcAft>
+                <a:spcPts val="600"/>
+              </a:spcAft>
+            </a:pPr>
+            <a:r>
+              <a:rPr sz="1500">
+                <a:solidFill>
+                  <a:srgbClr val="22282E"/>
+                </a:solidFill>
+              </a:rPr>
+              <a:t>•  BOLA (API1) — IDOR de las APIs; acceder al objeto de otro usuario</a:t>
+            </a:r>
+          </a:p>
+          <a:p>
+            <a:pPr>
+              <a:spcAft>
+                <a:spcPts val="600"/>
+              </a:spcAft>
+            </a:pPr>
+            <a:r>
+              <a:rPr sz="1500">
+                <a:solidFill>
+                  <a:srgbClr val="22282E"/>
+                </a:solidFill>
+              </a:rPr>
+              <a:t>•  BFLA (API5) — Forced browsing; llamar a funciones de nivel superior</a:t>
+            </a:r>
+          </a:p>
+          <a:p>
+            <a:pPr>
+              <a:spcAft>
+                <a:spcPts val="600"/>
+              </a:spcAft>
+            </a:pPr>
+            <a:r>
+              <a:rPr sz="1500">
+                <a:solidFill>
+                  <a:srgbClr val="22282E"/>
+                </a:solidFill>
+              </a:rPr>
+              <a:t>•  Enumeración de endpoints — Descubrir rutas por docs, versiones y JS</a:t>
+            </a:r>
+          </a:p>
+          <a:p>
+            <a:pPr>
+              <a:spcAft>
+                <a:spcPts val="600"/>
+              </a:spcAft>
+            </a:pPr>
+            <a:r>
+              <a:rPr sz="1500">
+                <a:solidFill>
+                  <a:srgbClr val="22282E"/>
+                </a:solidFill>
+              </a:rPr>
+              <a:t>•  Swagger / OpenAPI — Documentación que revela los endpoints</a:t>
             </a:r>
           </a:p>
         </p:txBody>
@@ -4554,7 +4945,7 @@
                   <a:srgbClr val="0B3D2E"/>
                 </a:solidFill>
               </a:rPr>
-              <a:t>✍️ Ejercicios</a:t>
+              <a:t>🧰 Herramientas y preparación</a:t>
             </a:r>
           </a:p>
         </p:txBody>
@@ -4592,82 +4983,37 @@
                   <a:srgbClr val="22282E"/>
                 </a:solidFill>
               </a:rPr>
-              <a:t>•  Enumera los endpoints de crAPI y agrúpalos por sensibilidad.</a:t>
-            </a:r>
-          </a:p>
-          <a:p>
-            <a:pPr>
-              <a:spcAft>
-                <a:spcPts val="600"/>
-              </a:spcAft>
-            </a:pPr>
-            <a:r>
-              <a:rPr sz="1500">
-                <a:solidFill>
-                  <a:srgbClr val="22282E"/>
-                </a:solidFill>
-              </a:rPr>
-              <a:t>•  Explota un BOLA y documenta el dato de otro usuario obtenido.</a:t>
-            </a:r>
-          </a:p>
-          <a:p>
-            <a:pPr>
-              <a:spcAft>
-                <a:spcPts val="600"/>
-              </a:spcAft>
-            </a:pPr>
-            <a:r>
-              <a:rPr sz="1500">
-                <a:solidFill>
-                  <a:srgbClr val="22282E"/>
-                </a:solidFill>
-              </a:rPr>
-              <a:t>•  Encuentra un endpoint sin control de función y escálalo.</a:t>
-            </a:r>
-          </a:p>
-          <a:p>
-            <a:pPr>
-              <a:spcAft>
-                <a:spcPts val="600"/>
-              </a:spcAft>
-            </a:pPr>
-            <a:r>
-              <a:rPr sz="1500">
-                <a:solidFill>
-                  <a:srgbClr val="22282E"/>
-                </a:solidFill>
-              </a:rPr>
-              <a:t>•  Detecta exposición excesiva comparando lo mostrado en la UI vs. la respuesta cruda.</a:t>
-            </a:r>
-          </a:p>
-          <a:p>
-            <a:pPr>
-              <a:spcAft>
-                <a:spcPts val="600"/>
-              </a:spcAft>
-            </a:pPr>
-            <a:r>
-              <a:rPr sz="1500">
-                <a:solidFill>
-                  <a:srgbClr val="22282E"/>
-                </a:solidFill>
-              </a:rPr>
-              <a:t>•  Realiza un mass assignment que eleve privilegios en el lab.</a:t>
-            </a:r>
-          </a:p>
-          <a:p>
-            <a:pPr>
-              <a:spcAft>
-                <a:spcPts val="600"/>
-              </a:spcAft>
-            </a:pPr>
-            <a:r>
-              <a:rPr sz="1500">
-                <a:solidFill>
-                  <a:srgbClr val="22282E"/>
-                </a:solidFill>
-              </a:rPr>
-              <a:t>•  Diseña la autorización correcta por objeto y por función.</a:t>
+              <a:t>•  Postman o Burp para construir peticiones a la API.</a:t>
+            </a:r>
+          </a:p>
+          <a:p>
+            <a:pPr>
+              <a:spcAft>
+                <a:spcPts val="600"/>
+              </a:spcAft>
+            </a:pPr>
+            <a:r>
+              <a:rPr sz="1500">
+                <a:solidFill>
+                  <a:srgbClr val="22282E"/>
+                </a:solidFill>
+              </a:rPr>
+              <a:t>•  crAPI o VAmPI (APIs deliberadamente vulnerables) y Juice Shop.</a:t>
+            </a:r>
+          </a:p>
+          <a:p>
+            <a:pPr>
+              <a:spcAft>
+                <a:spcPts val="600"/>
+              </a:spcAft>
+            </a:pPr>
+            <a:r>
+              <a:rPr sz="1500">
+                <a:solidFill>
+                  <a:srgbClr val="22282E"/>
+                </a:solidFill>
+              </a:rPr>
+              <a:t>•  Especificación OpenAPI/Swagger si está disponible.</a:t>
             </a:r>
           </a:p>
         </p:txBody>
@@ -4718,7 +5064,7 @@
                   <a:srgbClr val="0B3D2E"/>
                 </a:solidFill>
               </a:rPr>
-              <a:t>📝 Reto verificable</a:t>
+              <a:t>🧪 Laboratorio guiado</a:t>
             </a:r>
           </a:p>
         </p:txBody>
@@ -4756,22 +5102,97 @@
                   <a:srgbClr val="22282E"/>
                 </a:solidFill>
               </a:rPr>
-              <a:t>•  En crAPI (o VAmPI), consigue acceso a datos de otro usuario vía BOLA y una escalada por mass assignment, documentando ambos.</a:t>
-            </a:r>
-          </a:p>
-          <a:p>
-            <a:pPr>
-              <a:spcAft>
-                <a:spcPts val="600"/>
-              </a:spcAft>
-            </a:pPr>
-            <a:r>
-              <a:rPr sz="1500">
-                <a:solidFill>
-                  <a:srgbClr val="22282E"/>
-                </a:solidFill>
-              </a:rPr>
-              <a:t>•  Criterio de aceptación: entregas las peticiones, la evidencia de acceso no autorizado y elevación de privilegio, y la defensa (comprobar propiedad del objeto, allowlist de campos, authz por función).</a:t>
+              <a:t>•  Descubre endpoints desde el Swagger/OpenAPI o analizando el JS del cliente.</a:t>
+            </a:r>
+          </a:p>
+          <a:p>
+            <a:pPr>
+              <a:spcAft>
+                <a:spcPts val="600"/>
+              </a:spcAft>
+            </a:pPr>
+            <a:r>
+              <a:rPr sz="1500">
+                <a:solidFill>
+                  <a:srgbClr val="22282E"/>
+                </a:solidFill>
+              </a:rPr>
+              <a:t>•  Autentícate como usuario A y localiza GET /api/users/{id}/orders.</a:t>
+            </a:r>
+          </a:p>
+          <a:p>
+            <a:pPr>
+              <a:spcAft>
+                <a:spcPts val="600"/>
+              </a:spcAft>
+            </a:pPr>
+            <a:r>
+              <a:rPr sz="1500">
+                <a:solidFill>
+                  <a:srgbClr val="22282E"/>
+                </a:solidFill>
+              </a:rPr>
+              <a:t>•  Cambia {id} al de otro usuario y comprueba BOLA.</a:t>
+            </a:r>
+          </a:p>
+          <a:p>
+            <a:pPr>
+              <a:spcAft>
+                <a:spcPts val="600"/>
+              </a:spcAft>
+            </a:pPr>
+            <a:r>
+              <a:rPr sz="1500">
+                <a:solidFill>
+                  <a:srgbClr val="22282E"/>
+                </a:solidFill>
+              </a:rPr>
+              <a:t>•  Prueba Broken Function Level Authorization: llama a un endpoint admin (/api/admin/...) con tu token normal.</a:t>
+            </a:r>
+          </a:p>
+          <a:p>
+            <a:pPr>
+              <a:spcAft>
+                <a:spcPts val="600"/>
+              </a:spcAft>
+            </a:pPr>
+            <a:r>
+              <a:rPr sz="1500">
+                <a:solidFill>
+                  <a:srgbClr val="22282E"/>
+                </a:solidFill>
+              </a:rPr>
+              <a:t>•  Inspecciona respuestas por exposición excesiva: ¿devuelve hashes, emails, roles no necesarios?</a:t>
+            </a:r>
+          </a:p>
+          <a:p>
+            <a:pPr>
+              <a:spcAft>
+                <a:spcPts val="600"/>
+              </a:spcAft>
+            </a:pPr>
+            <a:r>
+              <a:rPr sz="1500">
+                <a:solidFill>
+                  <a:srgbClr val="22282E"/>
+                </a:solidFill>
+              </a:rPr>
+              <a:t>•  Prueba mass assignment: añade "role":"admin" o "verified":true en un PUT de perfil.</a:t>
+            </a:r>
+          </a:p>
+          <a:p>
+            <a:pPr>
+              <a:spcAft>
+                <a:spcPts val="600"/>
+              </a:spcAft>
+            </a:pPr>
+            <a:r>
+              <a:rPr sz="1500">
+                <a:solidFill>
+                  <a:srgbClr val="22282E"/>
+                </a:solidFill>
+              </a:rPr>
+              <a:t>•  Evalúa el rate limiting enviando muchas peticiones y documenta el abuso posible.</a:t>
             </a:r>
           </a:p>
         </p:txBody>
